--- a/你的恩典夠我用 (崇拜版).pptx
+++ b/你的恩典夠我用 (崇拜版).pptx
@@ -169,7 +169,7 @@
           <a:lstStyle/>
           <a:p>
             <a:r>
-              <a:rPr lang="en-US" altLang="zh-TW" smtClean="0"/>
+              <a:rPr lang="en-US" altLang="zh-TW"/>
               <a:t>Click to edit Master title style</a:t>
             </a:r>
             <a:endParaRPr lang="zh-TW" altLang="en-US"/>
@@ -288,7 +288,7 @@
           </a:lstStyle>
           <a:p>
             <a:r>
-              <a:rPr lang="en-US" altLang="zh-TW" smtClean="0"/>
+              <a:rPr lang="en-US" altLang="zh-TW"/>
               <a:t>Click to edit Master subtitle style</a:t>
             </a:r>
             <a:endParaRPr lang="zh-TW" altLang="en-US"/>
@@ -312,7 +312,7 @@
           <a:p>
             <a:fld id="{BFEB1A99-8C3F-4D98-8584-B5DB38B1A655}" type="datetimeFigureOut">
               <a:rPr lang="zh-TW" altLang="en-US" smtClean="0"/>
-              <a:t>2023/3/11</a:t>
+              <a:t>2024/9/7</a:t>
             </a:fld>
             <a:endParaRPr lang="zh-TW" altLang="en-US"/>
           </a:p>
@@ -401,7 +401,7 @@
           <a:lstStyle/>
           <a:p>
             <a:r>
-              <a:rPr lang="en-US" altLang="zh-TW" smtClean="0"/>
+              <a:rPr lang="en-US" altLang="zh-TW"/>
               <a:t>Click to edit Master title style</a:t>
             </a:r>
             <a:endParaRPr lang="zh-TW" altLang="en-US"/>
@@ -425,35 +425,35 @@
           <a:p>
             <a:pPr lvl="0"/>
             <a:r>
-              <a:rPr lang="en-US" altLang="zh-TW" smtClean="0"/>
+              <a:rPr lang="en-US" altLang="zh-TW"/>
               <a:t>Click to edit Master text styles</a:t>
             </a:r>
           </a:p>
           <a:p>
             <a:pPr lvl="1"/>
             <a:r>
-              <a:rPr lang="en-US" altLang="zh-TW" smtClean="0"/>
+              <a:rPr lang="en-US" altLang="zh-TW"/>
               <a:t>Second level</a:t>
             </a:r>
           </a:p>
           <a:p>
             <a:pPr lvl="2"/>
             <a:r>
-              <a:rPr lang="en-US" altLang="zh-TW" smtClean="0"/>
+              <a:rPr lang="en-US" altLang="zh-TW"/>
               <a:t>Third level</a:t>
             </a:r>
           </a:p>
           <a:p>
             <a:pPr lvl="3"/>
             <a:r>
-              <a:rPr lang="en-US" altLang="zh-TW" smtClean="0"/>
+              <a:rPr lang="en-US" altLang="zh-TW"/>
               <a:t>Fourth level</a:t>
             </a:r>
           </a:p>
           <a:p>
             <a:pPr lvl="4"/>
             <a:r>
-              <a:rPr lang="en-US" altLang="zh-TW" smtClean="0"/>
+              <a:rPr lang="en-US" altLang="zh-TW"/>
               <a:t>Fifth level</a:t>
             </a:r>
             <a:endParaRPr lang="zh-TW" altLang="en-US"/>
@@ -477,7 +477,7 @@
           <a:p>
             <a:fld id="{BFEB1A99-8C3F-4D98-8584-B5DB38B1A655}" type="datetimeFigureOut">
               <a:rPr lang="zh-TW" altLang="en-US" smtClean="0"/>
-              <a:t>2023/3/11</a:t>
+              <a:t>2024/9/7</a:t>
             </a:fld>
             <a:endParaRPr lang="zh-TW" altLang="en-US"/>
           </a:p>
@@ -571,7 +571,7 @@
           <a:lstStyle/>
           <a:p>
             <a:r>
-              <a:rPr lang="en-US" altLang="zh-TW" smtClean="0"/>
+              <a:rPr lang="en-US" altLang="zh-TW"/>
               <a:t>Click to edit Master title style</a:t>
             </a:r>
             <a:endParaRPr lang="zh-TW" altLang="en-US"/>
@@ -600,35 +600,35 @@
           <a:p>
             <a:pPr lvl="0"/>
             <a:r>
-              <a:rPr lang="en-US" altLang="zh-TW" smtClean="0"/>
+              <a:rPr lang="en-US" altLang="zh-TW"/>
               <a:t>Click to edit Master text styles</a:t>
             </a:r>
           </a:p>
           <a:p>
             <a:pPr lvl="1"/>
             <a:r>
-              <a:rPr lang="en-US" altLang="zh-TW" smtClean="0"/>
+              <a:rPr lang="en-US" altLang="zh-TW"/>
               <a:t>Second level</a:t>
             </a:r>
           </a:p>
           <a:p>
             <a:pPr lvl="2"/>
             <a:r>
-              <a:rPr lang="en-US" altLang="zh-TW" smtClean="0"/>
+              <a:rPr lang="en-US" altLang="zh-TW"/>
               <a:t>Third level</a:t>
             </a:r>
           </a:p>
           <a:p>
             <a:pPr lvl="3"/>
             <a:r>
-              <a:rPr lang="en-US" altLang="zh-TW" smtClean="0"/>
+              <a:rPr lang="en-US" altLang="zh-TW"/>
               <a:t>Fourth level</a:t>
             </a:r>
           </a:p>
           <a:p>
             <a:pPr lvl="4"/>
             <a:r>
-              <a:rPr lang="en-US" altLang="zh-TW" smtClean="0"/>
+              <a:rPr lang="en-US" altLang="zh-TW"/>
               <a:t>Fifth level</a:t>
             </a:r>
             <a:endParaRPr lang="zh-TW" altLang="en-US"/>
@@ -652,7 +652,7 @@
           <a:p>
             <a:fld id="{BFEB1A99-8C3F-4D98-8584-B5DB38B1A655}" type="datetimeFigureOut">
               <a:rPr lang="zh-TW" altLang="en-US" smtClean="0"/>
-              <a:t>2023/3/11</a:t>
+              <a:t>2024/9/7</a:t>
             </a:fld>
             <a:endParaRPr lang="zh-TW" altLang="en-US"/>
           </a:p>
@@ -741,7 +741,7 @@
           <a:lstStyle/>
           <a:p>
             <a:r>
-              <a:rPr lang="en-US" altLang="zh-TW" smtClean="0"/>
+              <a:rPr lang="en-US" altLang="zh-TW"/>
               <a:t>Click to edit Master title style</a:t>
             </a:r>
             <a:endParaRPr lang="zh-TW" altLang="en-US"/>
@@ -765,35 +765,35 @@
           <a:p>
             <a:pPr lvl="0"/>
             <a:r>
-              <a:rPr lang="en-US" altLang="zh-TW" smtClean="0"/>
+              <a:rPr lang="en-US" altLang="zh-TW"/>
               <a:t>Click to edit Master text styles</a:t>
             </a:r>
           </a:p>
           <a:p>
             <a:pPr lvl="1"/>
             <a:r>
-              <a:rPr lang="en-US" altLang="zh-TW" smtClean="0"/>
+              <a:rPr lang="en-US" altLang="zh-TW"/>
               <a:t>Second level</a:t>
             </a:r>
           </a:p>
           <a:p>
             <a:pPr lvl="2"/>
             <a:r>
-              <a:rPr lang="en-US" altLang="zh-TW" smtClean="0"/>
+              <a:rPr lang="en-US" altLang="zh-TW"/>
               <a:t>Third level</a:t>
             </a:r>
           </a:p>
           <a:p>
             <a:pPr lvl="3"/>
             <a:r>
-              <a:rPr lang="en-US" altLang="zh-TW" smtClean="0"/>
+              <a:rPr lang="en-US" altLang="zh-TW"/>
               <a:t>Fourth level</a:t>
             </a:r>
           </a:p>
           <a:p>
             <a:pPr lvl="4"/>
             <a:r>
-              <a:rPr lang="en-US" altLang="zh-TW" smtClean="0"/>
+              <a:rPr lang="en-US" altLang="zh-TW"/>
               <a:t>Fifth level</a:t>
             </a:r>
             <a:endParaRPr lang="zh-TW" altLang="en-US"/>
@@ -817,7 +817,7 @@
           <a:p>
             <a:fld id="{BFEB1A99-8C3F-4D98-8584-B5DB38B1A655}" type="datetimeFigureOut">
               <a:rPr lang="zh-TW" altLang="en-US" smtClean="0"/>
-              <a:t>2023/3/11</a:t>
+              <a:t>2024/9/7</a:t>
             </a:fld>
             <a:endParaRPr lang="zh-TW" altLang="en-US"/>
           </a:p>
@@ -915,7 +915,7 @@
           </a:lstStyle>
           <a:p>
             <a:r>
-              <a:rPr lang="en-US" altLang="zh-TW" smtClean="0"/>
+              <a:rPr lang="en-US" altLang="zh-TW"/>
               <a:t>Click to edit Master title style</a:t>
             </a:r>
             <a:endParaRPr lang="zh-TW" altLang="en-US"/>
@@ -1035,7 +1035,7 @@
           <a:p>
             <a:pPr lvl="0"/>
             <a:r>
-              <a:rPr lang="en-US" altLang="zh-TW" smtClean="0"/>
+              <a:rPr lang="en-US" altLang="zh-TW"/>
               <a:t>Click to edit Master text styles</a:t>
             </a:r>
           </a:p>
@@ -1058,7 +1058,7 @@
           <a:p>
             <a:fld id="{BFEB1A99-8C3F-4D98-8584-B5DB38B1A655}" type="datetimeFigureOut">
               <a:rPr lang="zh-TW" altLang="en-US" smtClean="0"/>
-              <a:t>2023/3/11</a:t>
+              <a:t>2024/9/7</a:t>
             </a:fld>
             <a:endParaRPr lang="zh-TW" altLang="en-US"/>
           </a:p>
@@ -1147,7 +1147,7 @@
           <a:lstStyle/>
           <a:p>
             <a:r>
-              <a:rPr lang="en-US" altLang="zh-TW" smtClean="0"/>
+              <a:rPr lang="en-US" altLang="zh-TW"/>
               <a:t>Click to edit Master title style</a:t>
             </a:r>
             <a:endParaRPr lang="zh-TW" altLang="en-US"/>
@@ -1204,35 +1204,35 @@
           <a:p>
             <a:pPr lvl="0"/>
             <a:r>
-              <a:rPr lang="en-US" altLang="zh-TW" smtClean="0"/>
+              <a:rPr lang="en-US" altLang="zh-TW"/>
               <a:t>Click to edit Master text styles</a:t>
             </a:r>
           </a:p>
           <a:p>
             <a:pPr lvl="1"/>
             <a:r>
-              <a:rPr lang="en-US" altLang="zh-TW" smtClean="0"/>
+              <a:rPr lang="en-US" altLang="zh-TW"/>
               <a:t>Second level</a:t>
             </a:r>
           </a:p>
           <a:p>
             <a:pPr lvl="2"/>
             <a:r>
-              <a:rPr lang="en-US" altLang="zh-TW" smtClean="0"/>
+              <a:rPr lang="en-US" altLang="zh-TW"/>
               <a:t>Third level</a:t>
             </a:r>
           </a:p>
           <a:p>
             <a:pPr lvl="3"/>
             <a:r>
-              <a:rPr lang="en-US" altLang="zh-TW" smtClean="0"/>
+              <a:rPr lang="en-US" altLang="zh-TW"/>
               <a:t>Fourth level</a:t>
             </a:r>
           </a:p>
           <a:p>
             <a:pPr lvl="4"/>
             <a:r>
-              <a:rPr lang="en-US" altLang="zh-TW" smtClean="0"/>
+              <a:rPr lang="en-US" altLang="zh-TW"/>
               <a:t>Fifth level</a:t>
             </a:r>
             <a:endParaRPr lang="zh-TW" altLang="en-US"/>
@@ -1289,35 +1289,35 @@
           <a:p>
             <a:pPr lvl="0"/>
             <a:r>
-              <a:rPr lang="en-US" altLang="zh-TW" smtClean="0"/>
+              <a:rPr lang="en-US" altLang="zh-TW"/>
               <a:t>Click to edit Master text styles</a:t>
             </a:r>
           </a:p>
           <a:p>
             <a:pPr lvl="1"/>
             <a:r>
-              <a:rPr lang="en-US" altLang="zh-TW" smtClean="0"/>
+              <a:rPr lang="en-US" altLang="zh-TW"/>
               <a:t>Second level</a:t>
             </a:r>
           </a:p>
           <a:p>
             <a:pPr lvl="2"/>
             <a:r>
-              <a:rPr lang="en-US" altLang="zh-TW" smtClean="0"/>
+              <a:rPr lang="en-US" altLang="zh-TW"/>
               <a:t>Third level</a:t>
             </a:r>
           </a:p>
           <a:p>
             <a:pPr lvl="3"/>
             <a:r>
-              <a:rPr lang="en-US" altLang="zh-TW" smtClean="0"/>
+              <a:rPr lang="en-US" altLang="zh-TW"/>
               <a:t>Fourth level</a:t>
             </a:r>
           </a:p>
           <a:p>
             <a:pPr lvl="4"/>
             <a:r>
-              <a:rPr lang="en-US" altLang="zh-TW" smtClean="0"/>
+              <a:rPr lang="en-US" altLang="zh-TW"/>
               <a:t>Fifth level</a:t>
             </a:r>
             <a:endParaRPr lang="zh-TW" altLang="en-US"/>
@@ -1341,7 +1341,7 @@
           <a:p>
             <a:fld id="{BFEB1A99-8C3F-4D98-8584-B5DB38B1A655}" type="datetimeFigureOut">
               <a:rPr lang="zh-TW" altLang="en-US" smtClean="0"/>
-              <a:t>2023/3/11</a:t>
+              <a:t>2024/9/7</a:t>
             </a:fld>
             <a:endParaRPr lang="zh-TW" altLang="en-US"/>
           </a:p>
@@ -1434,7 +1434,7 @@
           </a:lstStyle>
           <a:p>
             <a:r>
-              <a:rPr lang="en-US" altLang="zh-TW" smtClean="0"/>
+              <a:rPr lang="en-US" altLang="zh-TW"/>
               <a:t>Click to edit Master title style</a:t>
             </a:r>
             <a:endParaRPr lang="zh-TW" altLang="en-US"/>
@@ -1500,7 +1500,7 @@
           <a:p>
             <a:pPr lvl="0"/>
             <a:r>
-              <a:rPr lang="en-US" altLang="zh-TW" smtClean="0"/>
+              <a:rPr lang="en-US" altLang="zh-TW"/>
               <a:t>Click to edit Master text styles</a:t>
             </a:r>
           </a:p>
@@ -1556,35 +1556,35 @@
           <a:p>
             <a:pPr lvl="0"/>
             <a:r>
-              <a:rPr lang="en-US" altLang="zh-TW" smtClean="0"/>
+              <a:rPr lang="en-US" altLang="zh-TW"/>
               <a:t>Click to edit Master text styles</a:t>
             </a:r>
           </a:p>
           <a:p>
             <a:pPr lvl="1"/>
             <a:r>
-              <a:rPr lang="en-US" altLang="zh-TW" smtClean="0"/>
+              <a:rPr lang="en-US" altLang="zh-TW"/>
               <a:t>Second level</a:t>
             </a:r>
           </a:p>
           <a:p>
             <a:pPr lvl="2"/>
             <a:r>
-              <a:rPr lang="en-US" altLang="zh-TW" smtClean="0"/>
+              <a:rPr lang="en-US" altLang="zh-TW"/>
               <a:t>Third level</a:t>
             </a:r>
           </a:p>
           <a:p>
             <a:pPr lvl="3"/>
             <a:r>
-              <a:rPr lang="en-US" altLang="zh-TW" smtClean="0"/>
+              <a:rPr lang="en-US" altLang="zh-TW"/>
               <a:t>Fourth level</a:t>
             </a:r>
           </a:p>
           <a:p>
             <a:pPr lvl="4"/>
             <a:r>
-              <a:rPr lang="en-US" altLang="zh-TW" smtClean="0"/>
+              <a:rPr lang="en-US" altLang="zh-TW"/>
               <a:t>Fifth level</a:t>
             </a:r>
             <a:endParaRPr lang="zh-TW" altLang="en-US"/>
@@ -1650,7 +1650,7 @@
           <a:p>
             <a:pPr lvl="0"/>
             <a:r>
-              <a:rPr lang="en-US" altLang="zh-TW" smtClean="0"/>
+              <a:rPr lang="en-US" altLang="zh-TW"/>
               <a:t>Click to edit Master text styles</a:t>
             </a:r>
           </a:p>
@@ -1706,35 +1706,35 @@
           <a:p>
             <a:pPr lvl="0"/>
             <a:r>
-              <a:rPr lang="en-US" altLang="zh-TW" smtClean="0"/>
+              <a:rPr lang="en-US" altLang="zh-TW"/>
               <a:t>Click to edit Master text styles</a:t>
             </a:r>
           </a:p>
           <a:p>
             <a:pPr lvl="1"/>
             <a:r>
-              <a:rPr lang="en-US" altLang="zh-TW" smtClean="0"/>
+              <a:rPr lang="en-US" altLang="zh-TW"/>
               <a:t>Second level</a:t>
             </a:r>
           </a:p>
           <a:p>
             <a:pPr lvl="2"/>
             <a:r>
-              <a:rPr lang="en-US" altLang="zh-TW" smtClean="0"/>
+              <a:rPr lang="en-US" altLang="zh-TW"/>
               <a:t>Third level</a:t>
             </a:r>
           </a:p>
           <a:p>
             <a:pPr lvl="3"/>
             <a:r>
-              <a:rPr lang="en-US" altLang="zh-TW" smtClean="0"/>
+              <a:rPr lang="en-US" altLang="zh-TW"/>
               <a:t>Fourth level</a:t>
             </a:r>
           </a:p>
           <a:p>
             <a:pPr lvl="4"/>
             <a:r>
-              <a:rPr lang="en-US" altLang="zh-TW" smtClean="0"/>
+              <a:rPr lang="en-US" altLang="zh-TW"/>
               <a:t>Fifth level</a:t>
             </a:r>
             <a:endParaRPr lang="zh-TW" altLang="en-US"/>
@@ -1758,7 +1758,7 @@
           <a:p>
             <a:fld id="{BFEB1A99-8C3F-4D98-8584-B5DB38B1A655}" type="datetimeFigureOut">
               <a:rPr lang="zh-TW" altLang="en-US" smtClean="0"/>
-              <a:t>2023/3/11</a:t>
+              <a:t>2024/9/7</a:t>
             </a:fld>
             <a:endParaRPr lang="zh-TW" altLang="en-US"/>
           </a:p>
@@ -1847,7 +1847,7 @@
           <a:lstStyle/>
           <a:p>
             <a:r>
-              <a:rPr lang="en-US" altLang="zh-TW" smtClean="0"/>
+              <a:rPr lang="en-US" altLang="zh-TW"/>
               <a:t>Click to edit Master title style</a:t>
             </a:r>
             <a:endParaRPr lang="zh-TW" altLang="en-US"/>
@@ -1871,7 +1871,7 @@
           <a:p>
             <a:fld id="{BFEB1A99-8C3F-4D98-8584-B5DB38B1A655}" type="datetimeFigureOut">
               <a:rPr lang="zh-TW" altLang="en-US" smtClean="0"/>
-              <a:t>2023/3/11</a:t>
+              <a:t>2024/9/7</a:t>
             </a:fld>
             <a:endParaRPr lang="zh-TW" altLang="en-US"/>
           </a:p>
@@ -1961,7 +1961,7 @@
           <a:p>
             <a:fld id="{BFEB1A99-8C3F-4D98-8584-B5DB38B1A655}" type="datetimeFigureOut">
               <a:rPr lang="zh-TW" altLang="en-US" smtClean="0"/>
-              <a:t>2023/3/11</a:t>
+              <a:t>2024/9/7</a:t>
             </a:fld>
             <a:endParaRPr lang="zh-TW" altLang="en-US"/>
           </a:p>
@@ -2059,7 +2059,7 @@
           </a:lstStyle>
           <a:p>
             <a:r>
-              <a:rPr lang="en-US" altLang="zh-TW" smtClean="0"/>
+              <a:rPr lang="en-US" altLang="zh-TW"/>
               <a:t>Click to edit Master title style</a:t>
             </a:r>
             <a:endParaRPr lang="zh-TW" altLang="en-US"/>
@@ -2116,35 +2116,35 @@
           <a:p>
             <a:pPr lvl="0"/>
             <a:r>
-              <a:rPr lang="en-US" altLang="zh-TW" smtClean="0"/>
+              <a:rPr lang="en-US" altLang="zh-TW"/>
               <a:t>Click to edit Master text styles</a:t>
             </a:r>
           </a:p>
           <a:p>
             <a:pPr lvl="1"/>
             <a:r>
-              <a:rPr lang="en-US" altLang="zh-TW" smtClean="0"/>
+              <a:rPr lang="en-US" altLang="zh-TW"/>
               <a:t>Second level</a:t>
             </a:r>
           </a:p>
           <a:p>
             <a:pPr lvl="2"/>
             <a:r>
-              <a:rPr lang="en-US" altLang="zh-TW" smtClean="0"/>
+              <a:rPr lang="en-US" altLang="zh-TW"/>
               <a:t>Third level</a:t>
             </a:r>
           </a:p>
           <a:p>
             <a:pPr lvl="3"/>
             <a:r>
-              <a:rPr lang="en-US" altLang="zh-TW" smtClean="0"/>
+              <a:rPr lang="en-US" altLang="zh-TW"/>
               <a:t>Fourth level</a:t>
             </a:r>
           </a:p>
           <a:p>
             <a:pPr lvl="4"/>
             <a:r>
-              <a:rPr lang="en-US" altLang="zh-TW" smtClean="0"/>
+              <a:rPr lang="en-US" altLang="zh-TW"/>
               <a:t>Fifth level</a:t>
             </a:r>
             <a:endParaRPr lang="zh-TW" altLang="en-US"/>
@@ -2210,7 +2210,7 @@
           <a:p>
             <a:pPr lvl="0"/>
             <a:r>
-              <a:rPr lang="en-US" altLang="zh-TW" smtClean="0"/>
+              <a:rPr lang="en-US" altLang="zh-TW"/>
               <a:t>Click to edit Master text styles</a:t>
             </a:r>
           </a:p>
@@ -2233,7 +2233,7 @@
           <a:p>
             <a:fld id="{BFEB1A99-8C3F-4D98-8584-B5DB38B1A655}" type="datetimeFigureOut">
               <a:rPr lang="zh-TW" altLang="en-US" smtClean="0"/>
-              <a:t>2023/3/11</a:t>
+              <a:t>2024/9/7</a:t>
             </a:fld>
             <a:endParaRPr lang="zh-TW" altLang="en-US"/>
           </a:p>
@@ -2331,7 +2331,7 @@
           </a:lstStyle>
           <a:p>
             <a:r>
-              <a:rPr lang="en-US" altLang="zh-TW" smtClean="0"/>
+              <a:rPr lang="en-US" altLang="zh-TW"/>
               <a:t>Click to edit Master title style</a:t>
             </a:r>
             <a:endParaRPr lang="zh-TW" altLang="en-US"/>
@@ -2396,7 +2396,7 @@
           </a:lstStyle>
           <a:p>
             <a:r>
-              <a:rPr lang="en-US" altLang="zh-TW" smtClean="0"/>
+              <a:rPr lang="en-US" altLang="zh-TW"/>
               <a:t>Click icon to add picture</a:t>
             </a:r>
             <a:endParaRPr lang="zh-TW" altLang="en-US"/>
@@ -2462,7 +2462,7 @@
           <a:p>
             <a:pPr lvl="0"/>
             <a:r>
-              <a:rPr lang="en-US" altLang="zh-TW" smtClean="0"/>
+              <a:rPr lang="en-US" altLang="zh-TW"/>
               <a:t>Click to edit Master text styles</a:t>
             </a:r>
           </a:p>
@@ -2485,7 +2485,7 @@
           <a:p>
             <a:fld id="{BFEB1A99-8C3F-4D98-8584-B5DB38B1A655}" type="datetimeFigureOut">
               <a:rPr lang="zh-TW" altLang="en-US" smtClean="0"/>
-              <a:t>2023/3/11</a:t>
+              <a:t>2024/9/7</a:t>
             </a:fld>
             <a:endParaRPr lang="zh-TW" altLang="en-US"/>
           </a:p>
@@ -2594,10 +2594,9 @@
           <a:lstStyle/>
           <a:p>
             <a:r>
-              <a:rPr lang="zh-TW" altLang="en-US" smtClean="0"/>
+              <a:rPr lang="zh-TW" altLang="en-US"/>
               <a:t>按一下以編輯母片標題樣式</a:t>
             </a:r>
-            <a:endParaRPr lang="zh-TW" altLang="en-US"/>
           </a:p>
         </p:txBody>
       </p:sp>
@@ -2628,38 +2627,37 @@
           <a:p>
             <a:pPr lvl="0"/>
             <a:r>
-              <a:rPr lang="zh-TW" altLang="en-US" smtClean="0"/>
+              <a:rPr lang="zh-TW" altLang="en-US"/>
               <a:t>按一下以編輯母片文字樣式</a:t>
             </a:r>
           </a:p>
           <a:p>
             <a:pPr lvl="1"/>
             <a:r>
-              <a:rPr lang="zh-TW" altLang="en-US" smtClean="0"/>
+              <a:rPr lang="zh-TW" altLang="en-US"/>
               <a:t>第二層</a:t>
             </a:r>
           </a:p>
           <a:p>
             <a:pPr lvl="2"/>
             <a:r>
-              <a:rPr lang="zh-TW" altLang="en-US" smtClean="0"/>
+              <a:rPr lang="zh-TW" altLang="en-US"/>
               <a:t>第三層</a:t>
             </a:r>
           </a:p>
           <a:p>
             <a:pPr lvl="3"/>
             <a:r>
-              <a:rPr lang="zh-TW" altLang="en-US" smtClean="0"/>
+              <a:rPr lang="zh-TW" altLang="en-US"/>
               <a:t>第四層</a:t>
             </a:r>
           </a:p>
           <a:p>
             <a:pPr lvl="4"/>
             <a:r>
-              <a:rPr lang="zh-TW" altLang="en-US" smtClean="0"/>
+              <a:rPr lang="zh-TW" altLang="en-US"/>
               <a:t>第五層</a:t>
             </a:r>
-            <a:endParaRPr lang="zh-TW" altLang="en-US"/>
           </a:p>
         </p:txBody>
       </p:sp>
@@ -2698,7 +2696,7 @@
           <a:p>
             <a:fld id="{BFEB1A99-8C3F-4D98-8584-B5DB38B1A655}" type="datetimeFigureOut">
               <a:rPr lang="zh-TW" altLang="en-US" smtClean="0"/>
-              <a:t>2023/3/11</a:t>
+              <a:t>2024/9/7</a:t>
             </a:fld>
             <a:endParaRPr lang="zh-TW" altLang="en-US"/>
           </a:p>
@@ -3091,7 +3089,7 @@
           <a:lstStyle/>
           <a:p>
             <a:r>
-              <a:rPr lang="zh-TW" altLang="en-US" sz="5400" b="1" i="1" dirty="0" smtClean="0">
+              <a:rPr lang="zh-TW" altLang="en-US" sz="5400" b="1" i="1" dirty="0">
                 <a:solidFill>
                   <a:srgbClr val="000066"/>
                 </a:solidFill>
@@ -3105,24 +3103,7 @@
                 <a:latin typeface="微軟正黑體" pitchFamily="34" charset="-120"/>
                 <a:ea typeface="微軟正黑體" pitchFamily="34" charset="-120"/>
               </a:rPr>
-              <a:t>祢</a:t>
-            </a:r>
-            <a:r>
-              <a:rPr lang="zh-TW" altLang="en-US" sz="5400" b="1" i="1" dirty="0">
-                <a:solidFill>
-                  <a:srgbClr val="000066"/>
-                </a:solidFill>
-                <a:effectLst>
-                  <a:outerShdw blurRad="38100" dist="38100" dir="2700000" algn="tl">
-                    <a:srgbClr val="000000">
-                      <a:alpha val="43137"/>
-                    </a:srgbClr>
-                  </a:outerShdw>
-                </a:effectLst>
-                <a:latin typeface="微軟正黑體" pitchFamily="34" charset="-120"/>
-                <a:ea typeface="微軟正黑體" pitchFamily="34" charset="-120"/>
-              </a:rPr>
-              <a:t>的恩典夠我用</a:t>
+              <a:t>祢的恩典夠我用</a:t>
             </a:r>
           </a:p>
         </p:txBody>
@@ -3190,17 +3171,7 @@
                 <a:latin typeface="微軟正黑體" pitchFamily="34" charset="-120"/>
                 <a:ea typeface="微軟正黑體" pitchFamily="34" charset="-120"/>
               </a:rPr>
-              <a:t>物換星移幾十</a:t>
-            </a:r>
-            <a:r>
-              <a:rPr lang="zh-TW" altLang="en-US" sz="4800" b="1" dirty="0" smtClean="0">
-                <a:solidFill>
-                  <a:srgbClr val="000066"/>
-                </a:solidFill>
-                <a:latin typeface="微軟正黑體" pitchFamily="34" charset="-120"/>
-                <a:ea typeface="微軟正黑體" pitchFamily="34" charset="-120"/>
-              </a:rPr>
-              <a:t>載　</a:t>
+              <a:t>物換星移幾十載　</a:t>
             </a:r>
           </a:p>
           <a:p>
@@ -3208,7 +3179,7 @@
               <a:buNone/>
             </a:pPr>
             <a:r>
-              <a:rPr lang="zh-TW" altLang="en-US" sz="4800" b="1" dirty="0" smtClean="0">
+              <a:rPr lang="zh-TW" altLang="en-US" sz="4800" b="1" dirty="0">
                 <a:solidFill>
                   <a:srgbClr val="000066"/>
                 </a:solidFill>
@@ -3237,7 +3208,7 @@
         <p:spPr>
           <a:xfrm>
             <a:off x="0" y="3795886"/>
-            <a:ext cx="9144000" cy="523220"/>
+            <a:ext cx="9144000" cy="461665"/>
           </a:xfrm>
           <a:prstGeom prst="rect">
             <a:avLst/>
@@ -3252,7 +3223,7 @@
           <a:p>
             <a:pPr algn="ctr"/>
             <a:r>
-              <a:rPr lang="en-US" sz="2800" b="1" dirty="0">
+              <a:rPr lang="en-US" sz="2400" b="1" dirty="0">
                 <a:solidFill>
                   <a:srgbClr val="000066"/>
                 </a:solidFill>
@@ -3263,7 +3234,7 @@
               <a:t>( </a:t>
             </a:r>
             <a:r>
-              <a:rPr lang="zh-CN" altLang="en-US" sz="2800" b="1" dirty="0">
+              <a:rPr lang="zh-CN" altLang="en-US" sz="2400" b="1" dirty="0">
                 <a:solidFill>
                   <a:srgbClr val="000066"/>
                 </a:solidFill>
@@ -3271,10 +3242,10 @@
                 <a:latin typeface="Microsoft JhengHei" panose="020B0604030504040204" pitchFamily="34" charset="-120"/>
                 <a:ea typeface="Microsoft JhengHei" panose="020B0604030504040204" pitchFamily="34" charset="-120"/>
               </a:rPr>
-              <a:t>正</a:t>
-            </a:r>
-            <a:r>
-              <a:rPr lang="en-US" sz="2800" b="1" dirty="0">
+              <a:t>正歌</a:t>
+            </a:r>
+            <a:r>
+              <a:rPr lang="en-US" sz="2400" b="1" dirty="0">
                 <a:solidFill>
                   <a:srgbClr val="000066"/>
                 </a:solidFill>
@@ -3284,7 +3255,7 @@
               </a:rPr>
               <a:t> )</a:t>
             </a:r>
-            <a:endParaRPr lang="vi-VN" sz="2800" b="1" dirty="0">
+            <a:endParaRPr lang="vi-VN" sz="2400" b="1" dirty="0">
               <a:solidFill>
                 <a:srgbClr val="000066"/>
               </a:solidFill>
@@ -3380,7 +3351,7 @@
         <p:spPr>
           <a:xfrm>
             <a:off x="0" y="3795886"/>
-            <a:ext cx="9144000" cy="523220"/>
+            <a:ext cx="9144000" cy="461665"/>
           </a:xfrm>
           <a:prstGeom prst="rect">
             <a:avLst/>
@@ -3395,7 +3366,7 @@
           <a:p>
             <a:pPr algn="ctr"/>
             <a:r>
-              <a:rPr lang="en-US" sz="2800" b="1" dirty="0">
+              <a:rPr lang="en-US" sz="2400" b="1" dirty="0">
                 <a:solidFill>
                   <a:srgbClr val="000066"/>
                 </a:solidFill>
@@ -3405,17 +3376,17 @@
               <a:t>( </a:t>
             </a:r>
             <a:r>
-              <a:rPr lang="zh-CN" altLang="en-US" sz="2800" b="1" dirty="0">
+              <a:rPr lang="zh-CN" altLang="en-US" sz="2400" b="1" dirty="0">
                 <a:solidFill>
                   <a:srgbClr val="000066"/>
                 </a:solidFill>
                 <a:latin typeface="Microsoft JhengHei" panose="020B0604030504040204" pitchFamily="34" charset="-120"/>
                 <a:ea typeface="Microsoft JhengHei" panose="020B0604030504040204" pitchFamily="34" charset="-120"/>
               </a:rPr>
-              <a:t>正</a:t>
-            </a:r>
-            <a:r>
-              <a:rPr lang="en-US" sz="2800" b="1" dirty="0">
+              <a:t>正歌</a:t>
+            </a:r>
+            <a:r>
+              <a:rPr lang="en-US" sz="2400" b="1" dirty="0">
                 <a:solidFill>
                   <a:srgbClr val="000066"/>
                 </a:solidFill>
@@ -3424,11 +3395,10 @@
               </a:rPr>
               <a:t> )</a:t>
             </a:r>
-            <a:endParaRPr lang="vi-VN" sz="2800" b="1" dirty="0">
+            <a:endParaRPr lang="vi-VN" sz="2400" b="1" dirty="0">
               <a:solidFill>
                 <a:srgbClr val="000066"/>
               </a:solidFill>
-              <a:latin typeface="Microsoft JhengHei" panose="020B0604030504040204" pitchFamily="34" charset="-120"/>
               <a:ea typeface="Microsoft JhengHei" panose="020B0604030504040204" pitchFamily="34" charset="-120"/>
             </a:endParaRPr>
           </a:p>
@@ -3497,19 +3467,9 @@
                 <a:latin typeface="微軟正黑體" pitchFamily="34" charset="-120"/>
                 <a:ea typeface="微軟正黑體" pitchFamily="34" charset="-120"/>
               </a:rPr>
-              <a:t>雖然經過水和</a:t>
-            </a:r>
-            <a:r>
-              <a:rPr lang="zh-TW" altLang="en-US" sz="4800" b="1" dirty="0" smtClean="0">
-                <a:solidFill>
-                  <a:srgbClr val="000066"/>
-                </a:solidFill>
-                <a:latin typeface="微軟正黑體" pitchFamily="34" charset="-120"/>
-                <a:ea typeface="微軟正黑體" pitchFamily="34" charset="-120"/>
-              </a:rPr>
-              <a:t>火</a:t>
-            </a:r>
-            <a:endParaRPr lang="vi-VN" altLang="zh-TW" sz="4800" b="1" dirty="0" smtClean="0">
+              <a:t>雖然經過水和火</a:t>
+            </a:r>
+            <a:endParaRPr lang="vi-VN" altLang="zh-TW" sz="4800" b="1" dirty="0">
               <a:solidFill>
                 <a:srgbClr val="000066"/>
               </a:solidFill>
@@ -3522,24 +3482,14 @@
               <a:buNone/>
             </a:pPr>
             <a:r>
-              <a:rPr lang="zh-TW" altLang="en-US" sz="4800" b="1" dirty="0" smtClean="0">
+              <a:rPr lang="zh-TW" altLang="en-US" sz="4800" b="1" dirty="0">
                 <a:solidFill>
                   <a:srgbClr val="000066"/>
                 </a:solidFill>
                 <a:latin typeface="微軟正黑體" pitchFamily="34" charset="-120"/>
                 <a:ea typeface="微軟正黑體" pitchFamily="34" charset="-120"/>
               </a:rPr>
-              <a:t>靠</a:t>
-            </a:r>
-            <a:r>
-              <a:rPr lang="zh-TW" altLang="en-US" sz="4800" b="1" dirty="0">
-                <a:solidFill>
-                  <a:srgbClr val="000066"/>
-                </a:solidFill>
-                <a:latin typeface="微軟正黑體" pitchFamily="34" charset="-120"/>
-                <a:ea typeface="微軟正黑體" pitchFamily="34" charset="-120"/>
-              </a:rPr>
-              <a:t>著主我就剛強</a:t>
+              <a:t>靠著主我就剛強</a:t>
             </a:r>
             <a:endParaRPr lang="en-US" altLang="zh-TW" sz="4800" b="1" dirty="0">
               <a:solidFill>
@@ -3561,7 +3511,7 @@
         <p:spPr>
           <a:xfrm>
             <a:off x="0" y="3795886"/>
-            <a:ext cx="9144000" cy="523220"/>
+            <a:ext cx="9144000" cy="461665"/>
           </a:xfrm>
           <a:prstGeom prst="rect">
             <a:avLst/>
@@ -3576,7 +3526,7 @@
           <a:p>
             <a:pPr algn="ctr"/>
             <a:r>
-              <a:rPr lang="en-US" sz="2800" b="1" dirty="0">
+              <a:rPr lang="en-US" sz="2400" b="1" dirty="0">
                 <a:solidFill>
                   <a:srgbClr val="000066"/>
                 </a:solidFill>
@@ -3586,17 +3536,17 @@
               <a:t>( </a:t>
             </a:r>
             <a:r>
-              <a:rPr lang="zh-CN" altLang="en-US" sz="2800" b="1" dirty="0">
+              <a:rPr lang="zh-CN" altLang="en-US" sz="2400" b="1" dirty="0">
                 <a:solidFill>
                   <a:srgbClr val="000066"/>
                 </a:solidFill>
                 <a:latin typeface="Microsoft JhengHei" panose="020B0604030504040204" pitchFamily="34" charset="-120"/>
                 <a:ea typeface="Microsoft JhengHei" panose="020B0604030504040204" pitchFamily="34" charset="-120"/>
               </a:rPr>
-              <a:t>正</a:t>
-            </a:r>
-            <a:r>
-              <a:rPr lang="en-US" sz="2800" b="1" dirty="0">
+              <a:t>正歌</a:t>
+            </a:r>
+            <a:r>
+              <a:rPr lang="en-US" sz="2400" b="1" dirty="0">
                 <a:solidFill>
                   <a:srgbClr val="000066"/>
                 </a:solidFill>
@@ -3605,11 +3555,10 @@
               </a:rPr>
               <a:t> )</a:t>
             </a:r>
-            <a:endParaRPr lang="vi-VN" sz="2800" b="1" dirty="0">
+            <a:endParaRPr lang="vi-VN" sz="2400" b="1" dirty="0">
               <a:solidFill>
                 <a:srgbClr val="000066"/>
               </a:solidFill>
-              <a:latin typeface="Microsoft JhengHei" panose="020B0604030504040204" pitchFamily="34" charset="-120"/>
               <a:ea typeface="Microsoft JhengHei" panose="020B0604030504040204" pitchFamily="34" charset="-120"/>
             </a:endParaRPr>
           </a:p>
@@ -3700,7 +3649,7 @@
         <p:spPr>
           <a:xfrm>
             <a:off x="0" y="3795886"/>
-            <a:ext cx="9144000" cy="523220"/>
+            <a:ext cx="9144000" cy="461665"/>
           </a:xfrm>
           <a:prstGeom prst="rect">
             <a:avLst/>
@@ -3715,7 +3664,7 @@
           <a:p>
             <a:pPr algn="ctr"/>
             <a:r>
-              <a:rPr lang="en-US" sz="2800" b="1" dirty="0">
+              <a:rPr lang="en-US" sz="2400" b="1" dirty="0">
                 <a:solidFill>
                   <a:srgbClr val="000066"/>
                 </a:solidFill>
@@ -3725,17 +3674,17 @@
               <a:t>( </a:t>
             </a:r>
             <a:r>
-              <a:rPr lang="zh-CN" altLang="en-US" sz="2800" b="1" dirty="0">
+              <a:rPr lang="zh-CN" altLang="en-US" sz="2400" b="1" dirty="0">
                 <a:solidFill>
                   <a:srgbClr val="000066"/>
                 </a:solidFill>
                 <a:latin typeface="Microsoft JhengHei" panose="020B0604030504040204" pitchFamily="34" charset="-120"/>
                 <a:ea typeface="Microsoft JhengHei" panose="020B0604030504040204" pitchFamily="34" charset="-120"/>
               </a:rPr>
-              <a:t>正</a:t>
-            </a:r>
-            <a:r>
-              <a:rPr lang="en-US" sz="2800" b="1" dirty="0">
+              <a:t>正歌</a:t>
+            </a:r>
+            <a:r>
+              <a:rPr lang="en-US" sz="2400" b="1" dirty="0">
                 <a:solidFill>
                   <a:srgbClr val="000066"/>
                 </a:solidFill>
@@ -3744,11 +3693,10 @@
               </a:rPr>
               <a:t> )</a:t>
             </a:r>
-            <a:endParaRPr lang="vi-VN" sz="2800" b="1" dirty="0">
+            <a:endParaRPr lang="vi-VN" sz="2400" b="1" dirty="0">
               <a:solidFill>
                 <a:srgbClr val="000066"/>
               </a:solidFill>
-              <a:latin typeface="Microsoft JhengHei" panose="020B0604030504040204" pitchFamily="34" charset="-120"/>
               <a:ea typeface="Microsoft JhengHei" panose="020B0604030504040204" pitchFamily="34" charset="-120"/>
             </a:endParaRPr>
           </a:p>
@@ -3817,19 +3765,9 @@
                 <a:latin typeface="微軟正黑體" pitchFamily="34" charset="-120"/>
                 <a:ea typeface="微軟正黑體" pitchFamily="34" charset="-120"/>
               </a:rPr>
-              <a:t>祢的恩典夠我</a:t>
-            </a:r>
-            <a:r>
-              <a:rPr lang="zh-TW" altLang="en-US" sz="4800" b="1" dirty="0" smtClean="0">
-                <a:solidFill>
-                  <a:srgbClr val="000066"/>
-                </a:solidFill>
-                <a:latin typeface="微軟正黑體" pitchFamily="34" charset="-120"/>
-                <a:ea typeface="微軟正黑體" pitchFamily="34" charset="-120"/>
-              </a:rPr>
-              <a:t>用</a:t>
-            </a:r>
-            <a:endParaRPr lang="en-US" altLang="zh-TW" sz="4800" b="1" dirty="0" smtClean="0">
+              <a:t>祢的恩典夠我用</a:t>
+            </a:r>
+            <a:endParaRPr lang="en-US" altLang="zh-TW" sz="4800" b="1" dirty="0">
               <a:solidFill>
                 <a:srgbClr val="000066"/>
               </a:solidFill>
@@ -3842,24 +3780,14 @@
               <a:buNone/>
             </a:pPr>
             <a:r>
-              <a:rPr lang="zh-TW" altLang="en-US" sz="4800" b="1" dirty="0" smtClean="0">
+              <a:rPr lang="zh-TW" altLang="en-US" sz="4800" b="1" dirty="0">
                 <a:solidFill>
                   <a:srgbClr val="000066"/>
                 </a:solidFill>
                 <a:latin typeface="微軟正黑體" pitchFamily="34" charset="-120"/>
                 <a:ea typeface="微軟正黑體" pitchFamily="34" charset="-120"/>
               </a:rPr>
-              <a:t>能</a:t>
-            </a:r>
-            <a:r>
-              <a:rPr lang="zh-TW" altLang="en-US" sz="4800" b="1" dirty="0">
-                <a:solidFill>
-                  <a:srgbClr val="000066"/>
-                </a:solidFill>
-                <a:latin typeface="微軟正黑體" pitchFamily="34" charset="-120"/>
-                <a:ea typeface="微軟正黑體" pitchFamily="34" charset="-120"/>
-              </a:rPr>
-              <a:t>力覆庇我軟弱</a:t>
+              <a:t>能力覆庇我軟弱</a:t>
             </a:r>
             <a:endParaRPr lang="en-US" altLang="zh-TW" sz="4800" b="1" dirty="0">
               <a:solidFill>
@@ -3881,7 +3809,7 @@
         <p:spPr>
           <a:xfrm>
             <a:off x="0" y="3795886"/>
-            <a:ext cx="9144000" cy="523220"/>
+            <a:ext cx="9144000" cy="461665"/>
           </a:xfrm>
           <a:prstGeom prst="rect">
             <a:avLst/>
@@ -3896,7 +3824,7 @@
           <a:p>
             <a:pPr algn="ctr"/>
             <a:r>
-              <a:rPr lang="en-US" sz="2800" b="1" dirty="0">
+              <a:rPr lang="en-US" sz="2400" b="1" dirty="0">
                 <a:solidFill>
                   <a:srgbClr val="000066"/>
                 </a:solidFill>
@@ -3906,40 +3834,29 @@
               <a:t>( </a:t>
             </a:r>
             <a:r>
-              <a:rPr lang="zh-CN" altLang="en-US" sz="2800" b="1" dirty="0">
+              <a:rPr lang="zh-CN" altLang="en-US" sz="2400" b="1" dirty="0">
                 <a:solidFill>
                   <a:srgbClr val="000066"/>
                 </a:solidFill>
                 <a:latin typeface="Microsoft JhengHei" panose="020B0604030504040204" pitchFamily="34" charset="-120"/>
                 <a:ea typeface="Microsoft JhengHei" panose="020B0604030504040204" pitchFamily="34" charset="-120"/>
               </a:rPr>
-              <a:t>副</a:t>
-            </a:r>
-            <a:r>
-              <a:rPr lang="en-US" sz="2800" b="1" dirty="0">
+              <a:t>副歌</a:t>
+            </a:r>
+            <a:r>
+              <a:rPr lang="en-US" sz="2400" b="1" dirty="0">
                 <a:solidFill>
                   <a:srgbClr val="000066"/>
                 </a:solidFill>
                 <a:latin typeface="Microsoft JhengHei" panose="020B0604030504040204" pitchFamily="34" charset="-120"/>
                 <a:ea typeface="Microsoft JhengHei" panose="020B0604030504040204" pitchFamily="34" charset="-120"/>
               </a:rPr>
-              <a:t> </a:t>
-            </a:r>
-            <a:r>
-              <a:rPr lang="en-US" sz="2800" b="1" dirty="0">
-                <a:solidFill>
-                  <a:srgbClr val="000066"/>
-                </a:solidFill>
-                <a:latin typeface="Microsoft JhengHei" panose="020B0604030504040204" pitchFamily="34" charset="-120"/>
-                <a:ea typeface="Microsoft JhengHei" panose="020B0604030504040204" pitchFamily="34" charset="-120"/>
-              </a:rPr>
-              <a:t>)</a:t>
-            </a:r>
-            <a:endParaRPr lang="vi-VN" sz="2800" b="1" dirty="0">
+              <a:t> )</a:t>
+            </a:r>
+            <a:endParaRPr lang="vi-VN" sz="2400" b="1" dirty="0">
               <a:solidFill>
                 <a:srgbClr val="000066"/>
               </a:solidFill>
-              <a:latin typeface="Microsoft JhengHei" panose="020B0604030504040204" pitchFamily="34" charset="-120"/>
               <a:ea typeface="Microsoft JhengHei" panose="020B0604030504040204" pitchFamily="34" charset="-120"/>
             </a:endParaRPr>
           </a:p>
@@ -4030,7 +3947,7 @@
         <p:spPr>
           <a:xfrm>
             <a:off x="0" y="3795886"/>
-            <a:ext cx="9144000" cy="523220"/>
+            <a:ext cx="9144000" cy="461665"/>
           </a:xfrm>
           <a:prstGeom prst="rect">
             <a:avLst/>
@@ -4045,7 +3962,7 @@
           <a:p>
             <a:pPr algn="ctr"/>
             <a:r>
-              <a:rPr lang="en-US" sz="2800" b="1" dirty="0">
+              <a:rPr lang="en-US" sz="2400" b="1" dirty="0">
                 <a:solidFill>
                   <a:srgbClr val="000066"/>
                 </a:solidFill>
@@ -4055,40 +3972,29 @@
               <a:t>( </a:t>
             </a:r>
             <a:r>
-              <a:rPr lang="zh-CN" altLang="en-US" sz="2800" b="1" dirty="0">
+              <a:rPr lang="zh-CN" altLang="en-US" sz="2400" b="1" dirty="0">
                 <a:solidFill>
                   <a:srgbClr val="000066"/>
                 </a:solidFill>
                 <a:latin typeface="Microsoft JhengHei" panose="020B0604030504040204" pitchFamily="34" charset="-120"/>
                 <a:ea typeface="Microsoft JhengHei" panose="020B0604030504040204" pitchFamily="34" charset="-120"/>
               </a:rPr>
-              <a:t>副</a:t>
-            </a:r>
-            <a:r>
-              <a:rPr lang="en-US" sz="2800" b="1" dirty="0">
+              <a:t>副歌</a:t>
+            </a:r>
+            <a:r>
+              <a:rPr lang="en-US" sz="2400" b="1" dirty="0">
                 <a:solidFill>
                   <a:srgbClr val="000066"/>
                 </a:solidFill>
                 <a:latin typeface="Microsoft JhengHei" panose="020B0604030504040204" pitchFamily="34" charset="-120"/>
                 <a:ea typeface="Microsoft JhengHei" panose="020B0604030504040204" pitchFamily="34" charset="-120"/>
               </a:rPr>
-              <a:t> </a:t>
-            </a:r>
-            <a:r>
-              <a:rPr lang="en-US" sz="2800" b="1" dirty="0">
-                <a:solidFill>
-                  <a:srgbClr val="000066"/>
-                </a:solidFill>
-                <a:latin typeface="Microsoft JhengHei" panose="020B0604030504040204" pitchFamily="34" charset="-120"/>
-                <a:ea typeface="Microsoft JhengHei" panose="020B0604030504040204" pitchFamily="34" charset="-120"/>
-              </a:rPr>
-              <a:t>)</a:t>
-            </a:r>
-            <a:endParaRPr lang="vi-VN" sz="2800" b="1" dirty="0">
+              <a:t> )</a:t>
+            </a:r>
+            <a:endParaRPr lang="vi-VN" sz="2400" b="1" dirty="0">
               <a:solidFill>
                 <a:srgbClr val="000066"/>
               </a:solidFill>
-              <a:latin typeface="Microsoft JhengHei" panose="020B0604030504040204" pitchFamily="34" charset="-120"/>
               <a:ea typeface="Microsoft JhengHei" panose="020B0604030504040204" pitchFamily="34" charset="-120"/>
             </a:endParaRPr>
           </a:p>
@@ -4157,19 +4063,9 @@
                 <a:latin typeface="微軟正黑體" pitchFamily="34" charset="-120"/>
                 <a:ea typeface="微軟正黑體" pitchFamily="34" charset="-120"/>
               </a:rPr>
-              <a:t>我要唱著祢的</a:t>
-            </a:r>
-            <a:r>
-              <a:rPr lang="zh-TW" altLang="en-US" sz="4800" b="1" dirty="0" smtClean="0">
-                <a:solidFill>
-                  <a:srgbClr val="000066"/>
-                </a:solidFill>
-                <a:latin typeface="微軟正黑體" pitchFamily="34" charset="-120"/>
-                <a:ea typeface="微軟正黑體" pitchFamily="34" charset="-120"/>
-              </a:rPr>
-              <a:t>愛</a:t>
-            </a:r>
-            <a:endParaRPr lang="vi-VN" altLang="zh-TW" sz="4800" b="1" dirty="0" smtClean="0">
+              <a:t>我要唱著祢的愛</a:t>
+            </a:r>
+            <a:endParaRPr lang="vi-VN" altLang="zh-TW" sz="4800" b="1" dirty="0">
               <a:solidFill>
                 <a:srgbClr val="000066"/>
               </a:solidFill>
@@ -4182,24 +4078,14 @@
               <a:buNone/>
             </a:pPr>
             <a:r>
-              <a:rPr lang="zh-TW" altLang="en-US" sz="4800" b="1" dirty="0" smtClean="0">
+              <a:rPr lang="zh-TW" altLang="en-US" sz="4800" b="1" dirty="0">
                 <a:solidFill>
                   <a:srgbClr val="000066"/>
                 </a:solidFill>
                 <a:latin typeface="微軟正黑體" pitchFamily="34" charset="-120"/>
                 <a:ea typeface="微軟正黑體" pitchFamily="34" charset="-120"/>
               </a:rPr>
-              <a:t>永</a:t>
-            </a:r>
-            <a:r>
-              <a:rPr lang="zh-TW" altLang="en-US" sz="4800" b="1" dirty="0">
-                <a:solidFill>
-                  <a:srgbClr val="000066"/>
-                </a:solidFill>
-                <a:latin typeface="微軟正黑體" pitchFamily="34" charset="-120"/>
-                <a:ea typeface="微軟正黑體" pitchFamily="34" charset="-120"/>
-              </a:rPr>
-              <a:t>恆無盡頭的愛</a:t>
+              <a:t>永恆無盡頭的愛</a:t>
             </a:r>
             <a:endParaRPr lang="en-US" altLang="zh-TW" sz="4800" b="1" dirty="0">
               <a:solidFill>
@@ -4221,7 +4107,7 @@
         <p:spPr>
           <a:xfrm>
             <a:off x="0" y="3795886"/>
-            <a:ext cx="9144000" cy="523220"/>
+            <a:ext cx="9144000" cy="461665"/>
           </a:xfrm>
           <a:prstGeom prst="rect">
             <a:avLst/>
@@ -4236,7 +4122,7 @@
           <a:p>
             <a:pPr algn="ctr"/>
             <a:r>
-              <a:rPr lang="en-US" sz="2800" b="1" dirty="0">
+              <a:rPr lang="en-US" sz="2400" b="1" dirty="0">
                 <a:solidFill>
                   <a:srgbClr val="000066"/>
                 </a:solidFill>
@@ -4246,40 +4132,29 @@
               <a:t>( </a:t>
             </a:r>
             <a:r>
-              <a:rPr lang="zh-CN" altLang="en-US" sz="2800" b="1" dirty="0">
+              <a:rPr lang="zh-CN" altLang="en-US" sz="2400" b="1" dirty="0">
                 <a:solidFill>
                   <a:srgbClr val="000066"/>
                 </a:solidFill>
                 <a:latin typeface="Microsoft JhengHei" panose="020B0604030504040204" pitchFamily="34" charset="-120"/>
                 <a:ea typeface="Microsoft JhengHei" panose="020B0604030504040204" pitchFamily="34" charset="-120"/>
               </a:rPr>
-              <a:t>副</a:t>
-            </a:r>
-            <a:r>
-              <a:rPr lang="en-US" sz="2800" b="1" dirty="0">
+              <a:t>副歌</a:t>
+            </a:r>
+            <a:r>
+              <a:rPr lang="en-US" sz="2400" b="1" dirty="0">
                 <a:solidFill>
                   <a:srgbClr val="000066"/>
                 </a:solidFill>
                 <a:latin typeface="Microsoft JhengHei" panose="020B0604030504040204" pitchFamily="34" charset="-120"/>
                 <a:ea typeface="Microsoft JhengHei" panose="020B0604030504040204" pitchFamily="34" charset="-120"/>
               </a:rPr>
-              <a:t> </a:t>
-            </a:r>
-            <a:r>
-              <a:rPr lang="en-US" sz="2800" b="1" dirty="0">
-                <a:solidFill>
-                  <a:srgbClr val="000066"/>
-                </a:solidFill>
-                <a:latin typeface="Microsoft JhengHei" panose="020B0604030504040204" pitchFamily="34" charset="-120"/>
-                <a:ea typeface="Microsoft JhengHei" panose="020B0604030504040204" pitchFamily="34" charset="-120"/>
-              </a:rPr>
-              <a:t>)</a:t>
-            </a:r>
-            <a:endParaRPr lang="vi-VN" sz="2800" b="1" dirty="0">
+              <a:t> )</a:t>
+            </a:r>
+            <a:endParaRPr lang="vi-VN" sz="2400" b="1" dirty="0">
               <a:solidFill>
                 <a:srgbClr val="000066"/>
               </a:solidFill>
-              <a:latin typeface="Microsoft JhengHei" panose="020B0604030504040204" pitchFamily="34" charset="-120"/>
               <a:ea typeface="Microsoft JhengHei" panose="020B0604030504040204" pitchFamily="34" charset="-120"/>
             </a:endParaRPr>
           </a:p>
@@ -4351,7 +4226,7 @@
               <a:t>永不離棄  </a:t>
             </a:r>
             <a:r>
-              <a:rPr lang="vi-VN" altLang="zh-TW" sz="4800" b="1" dirty="0" smtClean="0">
+              <a:rPr lang="vi-VN" altLang="zh-TW" sz="4800" b="1" dirty="0">
                 <a:solidFill>
                   <a:srgbClr val="000066"/>
                 </a:solidFill>
@@ -4361,24 +4236,14 @@
               <a:t> </a:t>
             </a:r>
             <a:r>
-              <a:rPr lang="zh-TW" altLang="en-US" sz="4800" b="1" dirty="0" smtClean="0">
+              <a:rPr lang="zh-TW" altLang="en-US" sz="4800" b="1" dirty="0">
                 <a:solidFill>
                   <a:srgbClr val="000066"/>
                 </a:solidFill>
                 <a:latin typeface="微軟正黑體" pitchFamily="34" charset="-120"/>
                 <a:ea typeface="微軟正黑體" pitchFamily="34" charset="-120"/>
               </a:rPr>
-              <a:t>一</a:t>
-            </a:r>
-            <a:r>
-              <a:rPr lang="zh-TW" altLang="en-US" sz="4800" b="1" dirty="0">
-                <a:solidFill>
-                  <a:srgbClr val="000066"/>
-                </a:solidFill>
-                <a:latin typeface="微軟正黑體" pitchFamily="34" charset="-120"/>
-                <a:ea typeface="微軟正黑體" pitchFamily="34" charset="-120"/>
-              </a:rPr>
-              <a:t>生常相伴</a:t>
+              <a:t>一生常相伴</a:t>
             </a:r>
             <a:endParaRPr lang="en-US" altLang="zh-TW" sz="4800" b="1" dirty="0">
               <a:solidFill>
@@ -4400,7 +4265,7 @@
         <p:spPr>
           <a:xfrm>
             <a:off x="0" y="3795886"/>
-            <a:ext cx="9144000" cy="523220"/>
+            <a:ext cx="9144000" cy="461665"/>
           </a:xfrm>
           <a:prstGeom prst="rect">
             <a:avLst/>
@@ -4415,7 +4280,7 @@
           <a:p>
             <a:pPr algn="ctr"/>
             <a:r>
-              <a:rPr lang="en-US" sz="2800" b="1" dirty="0">
+              <a:rPr lang="en-US" sz="2400" b="1" dirty="0">
                 <a:solidFill>
                   <a:srgbClr val="000066"/>
                 </a:solidFill>
@@ -4425,40 +4290,29 @@
               <a:t>( </a:t>
             </a:r>
             <a:r>
-              <a:rPr lang="zh-CN" altLang="en-US" sz="2800" b="1" dirty="0">
+              <a:rPr lang="zh-CN" altLang="en-US" sz="2400" b="1" dirty="0">
                 <a:solidFill>
                   <a:srgbClr val="000066"/>
                 </a:solidFill>
                 <a:latin typeface="Microsoft JhengHei" panose="020B0604030504040204" pitchFamily="34" charset="-120"/>
                 <a:ea typeface="Microsoft JhengHei" panose="020B0604030504040204" pitchFamily="34" charset="-120"/>
               </a:rPr>
-              <a:t>副</a:t>
-            </a:r>
-            <a:r>
-              <a:rPr lang="en-US" sz="2800" b="1" dirty="0">
+              <a:t>副歌</a:t>
+            </a:r>
+            <a:r>
+              <a:rPr lang="en-US" sz="2400" b="1" dirty="0">
                 <a:solidFill>
                   <a:srgbClr val="000066"/>
                 </a:solidFill>
                 <a:latin typeface="Microsoft JhengHei" panose="020B0604030504040204" pitchFamily="34" charset="-120"/>
                 <a:ea typeface="Microsoft JhengHei" panose="020B0604030504040204" pitchFamily="34" charset="-120"/>
               </a:rPr>
-              <a:t> </a:t>
-            </a:r>
-            <a:r>
-              <a:rPr lang="en-US" sz="2800" b="1" dirty="0">
-                <a:solidFill>
-                  <a:srgbClr val="000066"/>
-                </a:solidFill>
-                <a:latin typeface="Microsoft JhengHei" panose="020B0604030504040204" pitchFamily="34" charset="-120"/>
-                <a:ea typeface="Microsoft JhengHei" panose="020B0604030504040204" pitchFamily="34" charset="-120"/>
-              </a:rPr>
-              <a:t>)</a:t>
-            </a:r>
-            <a:endParaRPr lang="vi-VN" sz="2800" b="1" dirty="0">
+              <a:t> )</a:t>
+            </a:r>
+            <a:endParaRPr lang="vi-VN" sz="2400" b="1" dirty="0">
               <a:solidFill>
                 <a:srgbClr val="000066"/>
               </a:solidFill>
-              <a:latin typeface="Microsoft JhengHei" panose="020B0604030504040204" pitchFamily="34" charset="-120"/>
               <a:ea typeface="Microsoft JhengHei" panose="020B0604030504040204" pitchFamily="34" charset="-120"/>
             </a:endParaRPr>
           </a:p>
